--- a/Slide/C/4.C_stage_File.pptx
+++ b/Slide/C/4.C_stage_File.pptx
@@ -10,16 +10,17 @@
     <p:sldId id="294" r:id="rId4"/>
     <p:sldId id="296" r:id="rId5"/>
     <p:sldId id="297" r:id="rId6"/>
-    <p:sldId id="284" r:id="rId7"/>
-    <p:sldId id="285" r:id="rId8"/>
-    <p:sldId id="286" r:id="rId9"/>
-    <p:sldId id="287" r:id="rId10"/>
-    <p:sldId id="288" r:id="rId11"/>
-    <p:sldId id="289" r:id="rId12"/>
-    <p:sldId id="290" r:id="rId13"/>
-    <p:sldId id="291" r:id="rId14"/>
-    <p:sldId id="292" r:id="rId15"/>
-    <p:sldId id="283" r:id="rId16"/>
+    <p:sldId id="298" r:id="rId7"/>
+    <p:sldId id="284" r:id="rId8"/>
+    <p:sldId id="285" r:id="rId9"/>
+    <p:sldId id="286" r:id="rId10"/>
+    <p:sldId id="287" r:id="rId11"/>
+    <p:sldId id="288" r:id="rId12"/>
+    <p:sldId id="289" r:id="rId13"/>
+    <p:sldId id="290" r:id="rId14"/>
+    <p:sldId id="291" r:id="rId15"/>
+    <p:sldId id="292" r:id="rId16"/>
+    <p:sldId id="283" r:id="rId17"/>
   </p:sldIdLst>
   <p:sldSz cx="12192000" cy="6858000"/>
   <p:notesSz cx="6858000" cy="9144000"/>
@@ -266,7 +267,7 @@
           <a:p>
             <a:fld id="{ECA3AE87-C17F-4F2C-92FF-7FE21F8A66BE}" type="datetimeFigureOut">
               <a:rPr lang="en-US" smtClean="0"/>
-              <a:t>11/14/2024</a:t>
+              <a:t>4/24/2025</a:t>
             </a:fld>
             <a:endParaRPr lang="en-US"/>
           </a:p>
@@ -434,7 +435,7 @@
           <a:p>
             <a:fld id="{ECA3AE87-C17F-4F2C-92FF-7FE21F8A66BE}" type="datetimeFigureOut">
               <a:rPr lang="en-US" smtClean="0"/>
-              <a:t>11/14/2024</a:t>
+              <a:t>4/24/2025</a:t>
             </a:fld>
             <a:endParaRPr lang="en-US"/>
           </a:p>
@@ -612,7 +613,7 @@
           <a:p>
             <a:fld id="{ECA3AE87-C17F-4F2C-92FF-7FE21F8A66BE}" type="datetimeFigureOut">
               <a:rPr lang="en-US" smtClean="0"/>
-              <a:t>11/14/2024</a:t>
+              <a:t>4/24/2025</a:t>
             </a:fld>
             <a:endParaRPr lang="en-US"/>
           </a:p>
@@ -780,7 +781,7 @@
           <a:p>
             <a:fld id="{ECA3AE87-C17F-4F2C-92FF-7FE21F8A66BE}" type="datetimeFigureOut">
               <a:rPr lang="en-US" smtClean="0"/>
-              <a:t>11/14/2024</a:t>
+              <a:t>4/24/2025</a:t>
             </a:fld>
             <a:endParaRPr lang="en-US"/>
           </a:p>
@@ -1025,7 +1026,7 @@
           <a:p>
             <a:fld id="{ECA3AE87-C17F-4F2C-92FF-7FE21F8A66BE}" type="datetimeFigureOut">
               <a:rPr lang="en-US" smtClean="0"/>
-              <a:t>11/14/2024</a:t>
+              <a:t>4/24/2025</a:t>
             </a:fld>
             <a:endParaRPr lang="en-US"/>
           </a:p>
@@ -1254,7 +1255,7 @@
           <a:p>
             <a:fld id="{ECA3AE87-C17F-4F2C-92FF-7FE21F8A66BE}" type="datetimeFigureOut">
               <a:rPr lang="en-US" smtClean="0"/>
-              <a:t>11/14/2024</a:t>
+              <a:t>4/24/2025</a:t>
             </a:fld>
             <a:endParaRPr lang="en-US"/>
           </a:p>
@@ -1618,7 +1619,7 @@
           <a:p>
             <a:fld id="{ECA3AE87-C17F-4F2C-92FF-7FE21F8A66BE}" type="datetimeFigureOut">
               <a:rPr lang="en-US" smtClean="0"/>
-              <a:t>11/14/2024</a:t>
+              <a:t>4/24/2025</a:t>
             </a:fld>
             <a:endParaRPr lang="en-US"/>
           </a:p>
@@ -1735,7 +1736,7 @@
           <a:p>
             <a:fld id="{ECA3AE87-C17F-4F2C-92FF-7FE21F8A66BE}" type="datetimeFigureOut">
               <a:rPr lang="en-US" smtClean="0"/>
-              <a:t>11/14/2024</a:t>
+              <a:t>4/24/2025</a:t>
             </a:fld>
             <a:endParaRPr lang="en-US"/>
           </a:p>
@@ -1830,7 +1831,7 @@
           <a:p>
             <a:fld id="{ECA3AE87-C17F-4F2C-92FF-7FE21F8A66BE}" type="datetimeFigureOut">
               <a:rPr lang="en-US" smtClean="0"/>
-              <a:t>11/14/2024</a:t>
+              <a:t>4/24/2025</a:t>
             </a:fld>
             <a:endParaRPr lang="en-US"/>
           </a:p>
@@ -2105,7 +2106,7 @@
           <a:p>
             <a:fld id="{ECA3AE87-C17F-4F2C-92FF-7FE21F8A66BE}" type="datetimeFigureOut">
               <a:rPr lang="en-US" smtClean="0"/>
-              <a:t>11/14/2024</a:t>
+              <a:t>4/24/2025</a:t>
             </a:fld>
             <a:endParaRPr lang="en-US"/>
           </a:p>
@@ -2357,7 +2358,7 @@
           <a:p>
             <a:fld id="{ECA3AE87-C17F-4F2C-92FF-7FE21F8A66BE}" type="datetimeFigureOut">
               <a:rPr lang="en-US" smtClean="0"/>
-              <a:t>11/14/2024</a:t>
+              <a:t>4/24/2025</a:t>
             </a:fld>
             <a:endParaRPr lang="en-US"/>
           </a:p>
@@ -2568,7 +2569,7 @@
           <a:p>
             <a:fld id="{ECA3AE87-C17F-4F2C-92FF-7FE21F8A66BE}" type="datetimeFigureOut">
               <a:rPr lang="en-US" smtClean="0"/>
-              <a:t>11/14/2024</a:t>
+              <a:t>4/24/2025</a:t>
             </a:fld>
             <a:endParaRPr lang="en-US"/>
           </a:p>
@@ -3132,6 +3133,176 @@
         <p:cNvPr id="1" name="">
           <a:extLst>
             <a:ext uri="{FF2B5EF4-FFF2-40B4-BE49-F238E27FC236}">
+              <a16:creationId xmlns:a16="http://schemas.microsoft.com/office/drawing/2014/main" id="{F6271311-D295-342A-425D-C41828B1A8FE}"/>
+            </a:ext>
+          </a:extLst>
+        </p:cNvPr>
+        <p:cNvGrpSpPr/>
+        <p:nvPr/>
+      </p:nvGrpSpPr>
+      <p:grpSpPr>
+        <a:xfrm>
+          <a:off x="0" y="0"/>
+          <a:ext cx="0" cy="0"/>
+          <a:chOff x="0" y="0"/>
+          <a:chExt cx="0" cy="0"/>
+        </a:xfrm>
+      </p:grpSpPr>
+      <p:pic>
+        <p:nvPicPr>
+          <p:cNvPr id="6" name="Picture 5">
+            <a:extLst>
+              <a:ext uri="{FF2B5EF4-FFF2-40B4-BE49-F238E27FC236}">
+                <a16:creationId xmlns:a16="http://schemas.microsoft.com/office/drawing/2014/main" id="{A04E9534-2FAF-6672-FADF-2ED8012E5721}"/>
+              </a:ext>
+            </a:extLst>
+          </p:cNvPr>
+          <p:cNvPicPr>
+            <a:picLocks noChangeAspect="1"/>
+          </p:cNvPicPr>
+          <p:nvPr/>
+        </p:nvPicPr>
+        <p:blipFill>
+          <a:blip r:embed="rId2" cstate="print">
+            <a:extLst>
+              <a:ext uri="{28A0092B-C50C-407E-A947-70E740481C1C}">
+                <a14:useLocalDpi xmlns:a14="http://schemas.microsoft.com/office/drawing/2010/main" val="0"/>
+              </a:ext>
+            </a:extLst>
+          </a:blip>
+          <a:stretch>
+            <a:fillRect/>
+          </a:stretch>
+        </p:blipFill>
+        <p:spPr>
+          <a:xfrm>
+            <a:off x="-117663" y="-89806"/>
+            <a:ext cx="12277005" cy="1420585"/>
+          </a:xfrm>
+          <a:prstGeom prst="rect">
+            <a:avLst/>
+          </a:prstGeom>
+        </p:spPr>
+      </p:pic>
+      <p:sp>
+        <p:nvSpPr>
+          <p:cNvPr id="2" name="TextBox 1">
+            <a:extLst>
+              <a:ext uri="{FF2B5EF4-FFF2-40B4-BE49-F238E27FC236}">
+                <a16:creationId xmlns:a16="http://schemas.microsoft.com/office/drawing/2014/main" id="{41B1E790-DAC7-2AB5-9300-359DF317C815}"/>
+              </a:ext>
+            </a:extLst>
+          </p:cNvPr>
+          <p:cNvSpPr txBox="1"/>
+          <p:nvPr/>
+        </p:nvSpPr>
+        <p:spPr>
+          <a:xfrm>
+            <a:off x="499933" y="1406106"/>
+            <a:ext cx="5520906" cy="707886"/>
+          </a:xfrm>
+          <a:prstGeom prst="rect">
+            <a:avLst/>
+          </a:prstGeom>
+          <a:solidFill>
+            <a:srgbClr val="EF9C66"/>
+          </a:solidFill>
+        </p:spPr>
+        <p:txBody>
+          <a:bodyPr wrap="square" rtlCol="0">
+            <a:spAutoFit/>
+          </a:bodyPr>
+          <a:lstStyle/>
+          <a:p>
+            <a:r>
+              <a:rPr lang="en-US" sz="4000"/>
+              <a:t>2. Programing language</a:t>
+            </a:r>
+          </a:p>
+        </p:txBody>
+      </p:sp>
+      <p:sp>
+        <p:nvSpPr>
+          <p:cNvPr id="3" name="TextBox 2">
+            <a:extLst>
+              <a:ext uri="{FF2B5EF4-FFF2-40B4-BE49-F238E27FC236}">
+                <a16:creationId xmlns:a16="http://schemas.microsoft.com/office/drawing/2014/main" id="{0CCAD01D-B3F0-3378-3F0E-CEB67854FD7A}"/>
+              </a:ext>
+            </a:extLst>
+          </p:cNvPr>
+          <p:cNvSpPr txBox="1"/>
+          <p:nvPr/>
+        </p:nvSpPr>
+        <p:spPr>
+          <a:xfrm>
+            <a:off x="499933" y="2305050"/>
+            <a:ext cx="10387142" cy="1569660"/>
+          </a:xfrm>
+          <a:prstGeom prst="rect">
+            <a:avLst/>
+          </a:prstGeom>
+          <a:solidFill>
+            <a:srgbClr val="C8CFA0"/>
+          </a:solidFill>
+        </p:spPr>
+        <p:txBody>
+          <a:bodyPr wrap="square" rtlCol="0">
+            <a:spAutoFit/>
+          </a:bodyPr>
+          <a:lstStyle/>
+          <a:p>
+            <a:pPr marL="285750" indent="-285750">
+              <a:buFont typeface="Arial" panose="020B0604020202020204" pitchFamily="34" charset="0"/>
+              <a:buChar char="•"/>
+            </a:pPr>
+            <a:r>
+              <a:rPr lang="en-US" sz="3200"/>
+              <a:t>C language</a:t>
+            </a:r>
+          </a:p>
+          <a:p>
+            <a:pPr marL="742950" lvl="1" indent="-285750">
+              <a:buFont typeface="Arial" panose="020B0604020202020204" pitchFamily="34" charset="0"/>
+              <a:buChar char="•"/>
+            </a:pPr>
+            <a:r>
+              <a:rPr lang="en-US" sz="3200"/>
+              <a:t>Human readable</a:t>
+            </a:r>
+          </a:p>
+          <a:p>
+            <a:pPr marL="742950" lvl="1" indent="-285750">
+              <a:buFont typeface="Arial" panose="020B0604020202020204" pitchFamily="34" charset="0"/>
+              <a:buChar char="•"/>
+            </a:pPr>
+            <a:r>
+              <a:rPr lang="en-US" sz="3200"/>
+              <a:t>Computer cannot understand</a:t>
+            </a:r>
+          </a:p>
+        </p:txBody>
+      </p:sp>
+    </p:spTree>
+    <p:extLst>
+      <p:ext uri="{BB962C8B-B14F-4D97-AF65-F5344CB8AC3E}">
+        <p14:creationId xmlns:p14="http://schemas.microsoft.com/office/powerpoint/2010/main" val="2747209921"/>
+      </p:ext>
+    </p:extLst>
+  </p:cSld>
+  <p:clrMapOvr>
+    <a:masterClrMapping/>
+  </p:clrMapOvr>
+</p:sld>
+</file>
+
+<file path=ppt/slides/slide11.xml><?xml version="1.0" encoding="utf-8"?>
+<p:sld xmlns:a="http://schemas.openxmlformats.org/drawingml/2006/main" xmlns:r="http://schemas.openxmlformats.org/officeDocument/2006/relationships" xmlns:p="http://schemas.openxmlformats.org/presentationml/2006/main">
+  <p:cSld>
+    <p:spTree>
+      <p:nvGrpSpPr>
+        <p:cNvPr id="1" name="">
+          <a:extLst>
+            <a:ext uri="{FF2B5EF4-FFF2-40B4-BE49-F238E27FC236}">
               <a16:creationId xmlns:a16="http://schemas.microsoft.com/office/drawing/2014/main" id="{2EBE151E-1C45-39F4-63EB-CA4EA4ABC793}"/>
             </a:ext>
           </a:extLst>
@@ -3527,7 +3698,7 @@
 </p:sld>
 </file>
 
-<file path=ppt/slides/slide11.xml><?xml version="1.0" encoding="utf-8"?>
+<file path=ppt/slides/slide12.xml><?xml version="1.0" encoding="utf-8"?>
 <p:sld xmlns:a="http://schemas.openxmlformats.org/drawingml/2006/main" xmlns:r="http://schemas.openxmlformats.org/officeDocument/2006/relationships" xmlns:p="http://schemas.openxmlformats.org/presentationml/2006/main">
   <p:cSld>
     <p:spTree>
@@ -4113,7 +4284,7 @@
 </p:sld>
 </file>
 
-<file path=ppt/slides/slide12.xml><?xml version="1.0" encoding="utf-8"?>
+<file path=ppt/slides/slide13.xml><?xml version="1.0" encoding="utf-8"?>
 <p:sld xmlns:a="http://schemas.openxmlformats.org/drawingml/2006/main" xmlns:r="http://schemas.openxmlformats.org/officeDocument/2006/relationships" xmlns:p="http://schemas.openxmlformats.org/presentationml/2006/main">
   <p:cSld>
     <p:spTree>
@@ -4320,7 +4491,7 @@
 </p:sld>
 </file>
 
-<file path=ppt/slides/slide13.xml><?xml version="1.0" encoding="utf-8"?>
+<file path=ppt/slides/slide14.xml><?xml version="1.0" encoding="utf-8"?>
 <p:sld xmlns:a="http://schemas.openxmlformats.org/drawingml/2006/main" xmlns:r="http://schemas.openxmlformats.org/officeDocument/2006/relationships" xmlns:p="http://schemas.openxmlformats.org/presentationml/2006/main">
   <p:cSld>
     <p:spTree>
@@ -4500,7 +4671,7 @@
 </p:sld>
 </file>
 
-<file path=ppt/slides/slide14.xml><?xml version="1.0" encoding="utf-8"?>
+<file path=ppt/slides/slide15.xml><?xml version="1.0" encoding="utf-8"?>
 <p:sld xmlns:a="http://schemas.openxmlformats.org/drawingml/2006/main" xmlns:r="http://schemas.openxmlformats.org/officeDocument/2006/relationships" xmlns:p="http://schemas.openxmlformats.org/presentationml/2006/main">
   <p:cSld>
     <p:spTree>
@@ -4680,7 +4851,7 @@
 </p:sld>
 </file>
 
-<file path=ppt/slides/slide15.xml><?xml version="1.0" encoding="utf-8"?>
+<file path=ppt/slides/slide16.xml><?xml version="1.0" encoding="utf-8"?>
 <p:sld xmlns:a="http://schemas.openxmlformats.org/drawingml/2006/main" xmlns:r="http://schemas.openxmlformats.org/officeDocument/2006/relationships" xmlns:p="http://schemas.openxmlformats.org/presentationml/2006/main">
   <p:cSld>
     <p:spTree>
@@ -6906,7 +7077,7 @@
         </p:nvSpPr>
         <p:spPr>
           <a:xfrm>
-            <a:off x="8282541" y="3366855"/>
+            <a:off x="8356334" y="3320716"/>
             <a:ext cx="1631482" cy="1004224"/>
           </a:xfrm>
           <a:prstGeom prst="rect">
@@ -7000,6 +7171,1249 @@
 </file>
 
 <file path=ppt/slides/slide6.xml><?xml version="1.0" encoding="utf-8"?>
+<p:sld xmlns:a="http://schemas.openxmlformats.org/drawingml/2006/main" xmlns:r="http://schemas.openxmlformats.org/officeDocument/2006/relationships" xmlns:p="http://schemas.openxmlformats.org/presentationml/2006/main">
+  <p:cSld>
+    <p:spTree>
+      <p:nvGrpSpPr>
+        <p:cNvPr id="1" name="">
+          <a:extLst>
+            <a:ext uri="{FF2B5EF4-FFF2-40B4-BE49-F238E27FC236}">
+              <a16:creationId xmlns:a16="http://schemas.microsoft.com/office/drawing/2014/main" id="{71CF6954-EC2A-F8EE-3D64-0EB4F942D7BD}"/>
+            </a:ext>
+          </a:extLst>
+        </p:cNvPr>
+        <p:cNvGrpSpPr/>
+        <p:nvPr/>
+      </p:nvGrpSpPr>
+      <p:grpSpPr>
+        <a:xfrm>
+          <a:off x="0" y="0"/>
+          <a:ext cx="0" cy="0"/>
+          <a:chOff x="0" y="0"/>
+          <a:chExt cx="0" cy="0"/>
+        </a:xfrm>
+      </p:grpSpPr>
+      <p:sp>
+        <p:nvSpPr>
+          <p:cNvPr id="16" name="TextBox 15">
+            <a:extLst>
+              <a:ext uri="{FF2B5EF4-FFF2-40B4-BE49-F238E27FC236}">
+                <a16:creationId xmlns:a16="http://schemas.microsoft.com/office/drawing/2014/main" id="{FE42BEB2-467B-7F14-DDF3-044D94336885}"/>
+              </a:ext>
+            </a:extLst>
+          </p:cNvPr>
+          <p:cNvSpPr txBox="1"/>
+          <p:nvPr/>
+        </p:nvSpPr>
+        <p:spPr>
+          <a:xfrm>
+            <a:off x="5028989" y="523380"/>
+            <a:ext cx="3348592" cy="1754326"/>
+          </a:xfrm>
+          <a:prstGeom prst="rect">
+            <a:avLst/>
+          </a:prstGeom>
+          <a:noFill/>
+        </p:spPr>
+        <p:txBody>
+          <a:bodyPr wrap="square" rtlCol="0">
+            <a:spAutoFit/>
+          </a:bodyPr>
+          <a:lstStyle/>
+          <a:p>
+            <a:r>
+              <a:rPr lang="en-US"/>
+              <a:t>Stacking:</a:t>
+            </a:r>
+          </a:p>
+          <a:p>
+            <a:r>
+              <a:rPr lang="en-US"/>
+              <a:t>Lưu các biến tạm thời</a:t>
+            </a:r>
+          </a:p>
+          <a:p>
+            <a:endParaRPr lang="en-US"/>
+          </a:p>
+          <a:p>
+            <a:r>
+              <a:rPr lang="en-US"/>
+              <a:t>Unstacking: ngược lại của stacking</a:t>
+            </a:r>
+          </a:p>
+          <a:p>
+            <a:endParaRPr lang="en-US" dirty="0"/>
+          </a:p>
+        </p:txBody>
+      </p:sp>
+      <p:cxnSp>
+        <p:nvCxnSpPr>
+          <p:cNvPr id="20" name="Straight Arrow Connector 19">
+            <a:extLst>
+              <a:ext uri="{FF2B5EF4-FFF2-40B4-BE49-F238E27FC236}">
+                <a16:creationId xmlns:a16="http://schemas.microsoft.com/office/drawing/2014/main" id="{9B9E5171-7246-E3BB-9A4E-B0D0734B9029}"/>
+              </a:ext>
+            </a:extLst>
+          </p:cNvPr>
+          <p:cNvCxnSpPr>
+            <a:cxnSpLocks/>
+          </p:cNvCxnSpPr>
+          <p:nvPr/>
+        </p:nvCxnSpPr>
+        <p:spPr>
+          <a:xfrm flipH="1">
+            <a:off x="974595" y="1261712"/>
+            <a:ext cx="77804" cy="4696583"/>
+          </a:xfrm>
+          <a:prstGeom prst="straightConnector1">
+            <a:avLst/>
+          </a:prstGeom>
+          <a:ln>
+            <a:tailEnd type="triangle"/>
+          </a:ln>
+        </p:spPr>
+        <p:style>
+          <a:lnRef idx="1">
+            <a:schemeClr val="accent1"/>
+          </a:lnRef>
+          <a:fillRef idx="0">
+            <a:schemeClr val="accent1"/>
+          </a:fillRef>
+          <a:effectRef idx="0">
+            <a:schemeClr val="accent1"/>
+          </a:effectRef>
+          <a:fontRef idx="minor">
+            <a:schemeClr val="tx1"/>
+          </a:fontRef>
+        </p:style>
+      </p:cxnSp>
+      <p:sp>
+        <p:nvSpPr>
+          <p:cNvPr id="3" name="Rectangle 2">
+            <a:extLst>
+              <a:ext uri="{FF2B5EF4-FFF2-40B4-BE49-F238E27FC236}">
+                <a16:creationId xmlns:a16="http://schemas.microsoft.com/office/drawing/2014/main" id="{C1924DEE-3322-AF75-E8AF-9E1FD50077FC}"/>
+              </a:ext>
+            </a:extLst>
+          </p:cNvPr>
+          <p:cNvSpPr/>
+          <p:nvPr/>
+        </p:nvSpPr>
+        <p:spPr>
+          <a:xfrm>
+            <a:off x="8876581" y="2708694"/>
+            <a:ext cx="1570008" cy="3595308"/>
+          </a:xfrm>
+          <a:prstGeom prst="rect">
+            <a:avLst/>
+          </a:prstGeom>
+        </p:spPr>
+        <p:style>
+          <a:lnRef idx="2">
+            <a:schemeClr val="accent1">
+              <a:shade val="15000"/>
+            </a:schemeClr>
+          </a:lnRef>
+          <a:fillRef idx="1">
+            <a:schemeClr val="accent1"/>
+          </a:fillRef>
+          <a:effectRef idx="0">
+            <a:schemeClr val="accent1"/>
+          </a:effectRef>
+          <a:fontRef idx="minor">
+            <a:schemeClr val="lt1"/>
+          </a:fontRef>
+        </p:style>
+        <p:txBody>
+          <a:bodyPr rtlCol="0" anchor="ctr"/>
+          <a:lstStyle/>
+          <a:p>
+            <a:pPr algn="ctr"/>
+            <a:endParaRPr lang="en-US"/>
+          </a:p>
+        </p:txBody>
+      </p:sp>
+      <p:sp>
+        <p:nvSpPr>
+          <p:cNvPr id="4" name="Rectangle 3">
+            <a:extLst>
+              <a:ext uri="{FF2B5EF4-FFF2-40B4-BE49-F238E27FC236}">
+                <a16:creationId xmlns:a16="http://schemas.microsoft.com/office/drawing/2014/main" id="{F4096055-5FC7-5E15-7CF4-D886AE527A94}"/>
+              </a:ext>
+            </a:extLst>
+          </p:cNvPr>
+          <p:cNvSpPr/>
+          <p:nvPr/>
+        </p:nvSpPr>
+        <p:spPr>
+          <a:xfrm>
+            <a:off x="8876581" y="5598543"/>
+            <a:ext cx="1570008" cy="705459"/>
+          </a:xfrm>
+          <a:prstGeom prst="rect">
+            <a:avLst/>
+          </a:prstGeom>
+        </p:spPr>
+        <p:style>
+          <a:lnRef idx="0">
+            <a:schemeClr val="accent6"/>
+          </a:lnRef>
+          <a:fillRef idx="3">
+            <a:schemeClr val="accent6"/>
+          </a:fillRef>
+          <a:effectRef idx="3">
+            <a:schemeClr val="accent6"/>
+          </a:effectRef>
+          <a:fontRef idx="minor">
+            <a:schemeClr val="lt1"/>
+          </a:fontRef>
+        </p:style>
+        <p:txBody>
+          <a:bodyPr rtlCol="0" anchor="ctr"/>
+          <a:lstStyle/>
+          <a:p>
+            <a:pPr algn="ctr"/>
+            <a:r>
+              <a:rPr lang="en-US"/>
+              <a:t>Text</a:t>
+            </a:r>
+          </a:p>
+        </p:txBody>
+      </p:sp>
+      <p:sp>
+        <p:nvSpPr>
+          <p:cNvPr id="6" name="Rectangle 5">
+            <a:extLst>
+              <a:ext uri="{FF2B5EF4-FFF2-40B4-BE49-F238E27FC236}">
+                <a16:creationId xmlns:a16="http://schemas.microsoft.com/office/drawing/2014/main" id="{3385D397-9AFD-0E80-41CC-2FC5CADD6583}"/>
+              </a:ext>
+            </a:extLst>
+          </p:cNvPr>
+          <p:cNvSpPr/>
+          <p:nvPr/>
+        </p:nvSpPr>
+        <p:spPr>
+          <a:xfrm>
+            <a:off x="8876581" y="5154011"/>
+            <a:ext cx="1570008" cy="444532"/>
+          </a:xfrm>
+          <a:prstGeom prst="rect">
+            <a:avLst/>
+          </a:prstGeom>
+        </p:spPr>
+        <p:style>
+          <a:lnRef idx="0">
+            <a:schemeClr val="accent4"/>
+          </a:lnRef>
+          <a:fillRef idx="3">
+            <a:schemeClr val="accent4"/>
+          </a:fillRef>
+          <a:effectRef idx="3">
+            <a:schemeClr val="accent4"/>
+          </a:effectRef>
+          <a:fontRef idx="minor">
+            <a:schemeClr val="lt1"/>
+          </a:fontRef>
+        </p:style>
+        <p:txBody>
+          <a:bodyPr rtlCol="0" anchor="ctr"/>
+          <a:lstStyle/>
+          <a:p>
+            <a:pPr algn="ctr"/>
+            <a:r>
+              <a:rPr lang="en-US"/>
+              <a:t>Data</a:t>
+            </a:r>
+          </a:p>
+        </p:txBody>
+      </p:sp>
+      <p:sp>
+        <p:nvSpPr>
+          <p:cNvPr id="8" name="Rectangle 7">
+            <a:extLst>
+              <a:ext uri="{FF2B5EF4-FFF2-40B4-BE49-F238E27FC236}">
+                <a16:creationId xmlns:a16="http://schemas.microsoft.com/office/drawing/2014/main" id="{20A2952A-A11D-3325-2630-737C0A474CBB}"/>
+              </a:ext>
+            </a:extLst>
+          </p:cNvPr>
+          <p:cNvSpPr/>
+          <p:nvPr/>
+        </p:nvSpPr>
+        <p:spPr>
+          <a:xfrm>
+            <a:off x="8886751" y="4789941"/>
+            <a:ext cx="1570008" cy="348656"/>
+          </a:xfrm>
+          <a:prstGeom prst="rect">
+            <a:avLst/>
+          </a:prstGeom>
+        </p:spPr>
+        <p:style>
+          <a:lnRef idx="3">
+            <a:schemeClr val="lt1"/>
+          </a:lnRef>
+          <a:fillRef idx="1">
+            <a:schemeClr val="accent2"/>
+          </a:fillRef>
+          <a:effectRef idx="1">
+            <a:schemeClr val="accent2"/>
+          </a:effectRef>
+          <a:fontRef idx="minor">
+            <a:schemeClr val="lt1"/>
+          </a:fontRef>
+        </p:style>
+        <p:txBody>
+          <a:bodyPr rtlCol="0" anchor="ctr"/>
+          <a:lstStyle/>
+          <a:p>
+            <a:pPr algn="ctr"/>
+            <a:r>
+              <a:rPr lang="en-US"/>
+              <a:t>Bss</a:t>
+            </a:r>
+          </a:p>
+        </p:txBody>
+      </p:sp>
+      <p:sp>
+        <p:nvSpPr>
+          <p:cNvPr id="9" name="Rectangle 8">
+            <a:extLst>
+              <a:ext uri="{FF2B5EF4-FFF2-40B4-BE49-F238E27FC236}">
+                <a16:creationId xmlns:a16="http://schemas.microsoft.com/office/drawing/2014/main" id="{521C8F1B-416B-36DF-ACDC-E03F10BC7F78}"/>
+              </a:ext>
+            </a:extLst>
+          </p:cNvPr>
+          <p:cNvSpPr/>
+          <p:nvPr/>
+        </p:nvSpPr>
+        <p:spPr>
+          <a:xfrm>
+            <a:off x="8876581" y="4488507"/>
+            <a:ext cx="1570008" cy="302606"/>
+          </a:xfrm>
+          <a:prstGeom prst="rect">
+            <a:avLst/>
+          </a:prstGeom>
+        </p:spPr>
+        <p:style>
+          <a:lnRef idx="1">
+            <a:schemeClr val="accent5"/>
+          </a:lnRef>
+          <a:fillRef idx="3">
+            <a:schemeClr val="accent5"/>
+          </a:fillRef>
+          <a:effectRef idx="2">
+            <a:schemeClr val="accent5"/>
+          </a:effectRef>
+          <a:fontRef idx="minor">
+            <a:schemeClr val="lt1"/>
+          </a:fontRef>
+        </p:style>
+        <p:txBody>
+          <a:bodyPr rtlCol="0" anchor="ctr"/>
+          <a:lstStyle/>
+          <a:p>
+            <a:pPr algn="ctr"/>
+            <a:r>
+              <a:rPr lang="en-US"/>
+              <a:t>Heap</a:t>
+            </a:r>
+          </a:p>
+        </p:txBody>
+      </p:sp>
+      <p:sp>
+        <p:nvSpPr>
+          <p:cNvPr id="10" name="Rectangle 9">
+            <a:extLst>
+              <a:ext uri="{FF2B5EF4-FFF2-40B4-BE49-F238E27FC236}">
+                <a16:creationId xmlns:a16="http://schemas.microsoft.com/office/drawing/2014/main" id="{E559A882-27A9-7701-C2A6-8E358CF6435D}"/>
+              </a:ext>
+            </a:extLst>
+          </p:cNvPr>
+          <p:cNvSpPr/>
+          <p:nvPr/>
+        </p:nvSpPr>
+        <p:spPr>
+          <a:xfrm>
+            <a:off x="8876581" y="2708695"/>
+            <a:ext cx="1570008" cy="1628500"/>
+          </a:xfrm>
+          <a:prstGeom prst="rect">
+            <a:avLst/>
+          </a:prstGeom>
+        </p:spPr>
+        <p:style>
+          <a:lnRef idx="1">
+            <a:schemeClr val="dk1"/>
+          </a:lnRef>
+          <a:fillRef idx="3">
+            <a:schemeClr val="dk1"/>
+          </a:fillRef>
+          <a:effectRef idx="2">
+            <a:schemeClr val="dk1"/>
+          </a:effectRef>
+          <a:fontRef idx="minor">
+            <a:schemeClr val="lt1"/>
+          </a:fontRef>
+        </p:style>
+        <p:txBody>
+          <a:bodyPr rtlCol="0" anchor="ctr"/>
+          <a:lstStyle/>
+          <a:p>
+            <a:pPr algn="ctr"/>
+            <a:r>
+              <a:rPr lang="en-US"/>
+              <a:t>Stack</a:t>
+            </a:r>
+          </a:p>
+        </p:txBody>
+      </p:sp>
+      <p:sp>
+        <p:nvSpPr>
+          <p:cNvPr id="11" name="TextBox 10">
+            <a:extLst>
+              <a:ext uri="{FF2B5EF4-FFF2-40B4-BE49-F238E27FC236}">
+                <a16:creationId xmlns:a16="http://schemas.microsoft.com/office/drawing/2014/main" id="{9040E2E7-CB5C-0F37-D549-90BCA910B2E7}"/>
+              </a:ext>
+            </a:extLst>
+          </p:cNvPr>
+          <p:cNvSpPr txBox="1"/>
+          <p:nvPr/>
+        </p:nvSpPr>
+        <p:spPr>
+          <a:xfrm>
+            <a:off x="8123208" y="6084778"/>
+            <a:ext cx="836762" cy="369332"/>
+          </a:xfrm>
+          <a:prstGeom prst="rect">
+            <a:avLst/>
+          </a:prstGeom>
+          <a:noFill/>
+        </p:spPr>
+        <p:txBody>
+          <a:bodyPr wrap="square" rtlCol="0">
+            <a:spAutoFit/>
+          </a:bodyPr>
+          <a:lstStyle/>
+          <a:p>
+            <a:r>
+              <a:rPr lang="en-US"/>
+              <a:t>0x0</a:t>
+            </a:r>
+          </a:p>
+        </p:txBody>
+      </p:sp>
+      <p:sp>
+        <p:nvSpPr>
+          <p:cNvPr id="12" name="TextBox 11">
+            <a:extLst>
+              <a:ext uri="{FF2B5EF4-FFF2-40B4-BE49-F238E27FC236}">
+                <a16:creationId xmlns:a16="http://schemas.microsoft.com/office/drawing/2014/main" id="{34B5EFE7-5C2E-33C8-96C8-95790D3BDC7E}"/>
+              </a:ext>
+            </a:extLst>
+          </p:cNvPr>
+          <p:cNvSpPr txBox="1"/>
+          <p:nvPr/>
+        </p:nvSpPr>
+        <p:spPr>
+          <a:xfrm>
+            <a:off x="7632834" y="2308534"/>
+            <a:ext cx="1489494" cy="369332"/>
+          </a:xfrm>
+          <a:prstGeom prst="rect">
+            <a:avLst/>
+          </a:prstGeom>
+          <a:noFill/>
+        </p:spPr>
+        <p:txBody>
+          <a:bodyPr wrap="square" rtlCol="0">
+            <a:spAutoFit/>
+          </a:bodyPr>
+          <a:lstStyle/>
+          <a:p>
+            <a:r>
+              <a:rPr lang="en-US"/>
+              <a:t>0xFFFF_FFFF</a:t>
+            </a:r>
+          </a:p>
+        </p:txBody>
+      </p:sp>
+      <p:cxnSp>
+        <p:nvCxnSpPr>
+          <p:cNvPr id="14" name="Straight Arrow Connector 13">
+            <a:extLst>
+              <a:ext uri="{FF2B5EF4-FFF2-40B4-BE49-F238E27FC236}">
+                <a16:creationId xmlns:a16="http://schemas.microsoft.com/office/drawing/2014/main" id="{90AA887C-2F96-5DD7-5751-5A1DC052D34C}"/>
+              </a:ext>
+            </a:extLst>
+          </p:cNvPr>
+          <p:cNvCxnSpPr>
+            <a:cxnSpLocks/>
+          </p:cNvCxnSpPr>
+          <p:nvPr/>
+        </p:nvCxnSpPr>
+        <p:spPr>
+          <a:xfrm>
+            <a:off x="7821669" y="3222946"/>
+            <a:ext cx="1243747" cy="6304"/>
+          </a:xfrm>
+          <a:prstGeom prst="straightConnector1">
+            <a:avLst/>
+          </a:prstGeom>
+          <a:ln>
+            <a:tailEnd type="triangle"/>
+          </a:ln>
+        </p:spPr>
+        <p:style>
+          <a:lnRef idx="3">
+            <a:schemeClr val="accent2"/>
+          </a:lnRef>
+          <a:fillRef idx="0">
+            <a:schemeClr val="accent2"/>
+          </a:fillRef>
+          <a:effectRef idx="2">
+            <a:schemeClr val="accent2"/>
+          </a:effectRef>
+          <a:fontRef idx="minor">
+            <a:schemeClr val="tx1"/>
+          </a:fontRef>
+        </p:style>
+      </p:cxnSp>
+      <p:sp>
+        <p:nvSpPr>
+          <p:cNvPr id="18" name="Rectangle 17">
+            <a:extLst>
+              <a:ext uri="{FF2B5EF4-FFF2-40B4-BE49-F238E27FC236}">
+                <a16:creationId xmlns:a16="http://schemas.microsoft.com/office/drawing/2014/main" id="{A10E68EF-DC3E-3F85-A809-682E52CEF691}"/>
+              </a:ext>
+            </a:extLst>
+          </p:cNvPr>
+          <p:cNvSpPr/>
+          <p:nvPr/>
+        </p:nvSpPr>
+        <p:spPr>
+          <a:xfrm>
+            <a:off x="1276709" y="1164565"/>
+            <a:ext cx="2467155" cy="2061713"/>
+          </a:xfrm>
+          <a:prstGeom prst="rect">
+            <a:avLst/>
+          </a:prstGeom>
+        </p:spPr>
+        <p:style>
+          <a:lnRef idx="1">
+            <a:schemeClr val="accent1"/>
+          </a:lnRef>
+          <a:fillRef idx="2">
+            <a:schemeClr val="accent1"/>
+          </a:fillRef>
+          <a:effectRef idx="1">
+            <a:schemeClr val="accent1"/>
+          </a:effectRef>
+          <a:fontRef idx="minor">
+            <a:schemeClr val="dk1"/>
+          </a:fontRef>
+        </p:style>
+        <p:txBody>
+          <a:bodyPr rtlCol="0" anchor="ctr"/>
+          <a:lstStyle/>
+          <a:p>
+            <a:pPr algn="ctr"/>
+            <a:r>
+              <a:rPr lang="en-US"/>
+              <a:t>Main</a:t>
+            </a:r>
+          </a:p>
+          <a:p>
+            <a:pPr algn="ctr"/>
+            <a:r>
+              <a:rPr lang="en-US"/>
+              <a:t>Z = sum(3, 4)</a:t>
+            </a:r>
+          </a:p>
+        </p:txBody>
+      </p:sp>
+      <p:sp>
+        <p:nvSpPr>
+          <p:cNvPr id="24" name="Rectangle 23">
+            <a:extLst>
+              <a:ext uri="{FF2B5EF4-FFF2-40B4-BE49-F238E27FC236}">
+                <a16:creationId xmlns:a16="http://schemas.microsoft.com/office/drawing/2014/main" id="{FCFE1359-A5CA-4DA8-AD60-B903EC2FA524}"/>
+              </a:ext>
+            </a:extLst>
+          </p:cNvPr>
+          <p:cNvSpPr/>
+          <p:nvPr/>
+        </p:nvSpPr>
+        <p:spPr>
+          <a:xfrm>
+            <a:off x="4553976" y="3285710"/>
+            <a:ext cx="1984848" cy="2061713"/>
+          </a:xfrm>
+          <a:prstGeom prst="rect">
+            <a:avLst/>
+          </a:prstGeom>
+        </p:spPr>
+        <p:style>
+          <a:lnRef idx="1">
+            <a:schemeClr val="accent4"/>
+          </a:lnRef>
+          <a:fillRef idx="2">
+            <a:schemeClr val="accent4"/>
+          </a:fillRef>
+          <a:effectRef idx="1">
+            <a:schemeClr val="accent4"/>
+          </a:effectRef>
+          <a:fontRef idx="minor">
+            <a:schemeClr val="dk1"/>
+          </a:fontRef>
+        </p:style>
+        <p:txBody>
+          <a:bodyPr rtlCol="0" anchor="ctr"/>
+          <a:lstStyle/>
+          <a:p>
+            <a:pPr algn="ctr"/>
+            <a:r>
+              <a:rPr lang="en-US"/>
+              <a:t>Sum</a:t>
+            </a:r>
+          </a:p>
+          <a:p>
+            <a:pPr algn="ctr"/>
+            <a:r>
+              <a:rPr lang="en-US"/>
+              <a:t>C = x + y</a:t>
+            </a:r>
+          </a:p>
+          <a:p>
+            <a:pPr algn="ctr"/>
+            <a:endParaRPr lang="en-US"/>
+          </a:p>
+          <a:p>
+            <a:pPr algn="ctr"/>
+            <a:r>
+              <a:rPr lang="en-US"/>
+              <a:t>Return d;</a:t>
+            </a:r>
+          </a:p>
+        </p:txBody>
+      </p:sp>
+      <p:sp>
+        <p:nvSpPr>
+          <p:cNvPr id="25" name="TextBox 24">
+            <a:extLst>
+              <a:ext uri="{FF2B5EF4-FFF2-40B4-BE49-F238E27FC236}">
+                <a16:creationId xmlns:a16="http://schemas.microsoft.com/office/drawing/2014/main" id="{8325E215-C1FF-76F1-BDC3-EB2D6B6BD826}"/>
+              </a:ext>
+            </a:extLst>
+          </p:cNvPr>
+          <p:cNvSpPr txBox="1"/>
+          <p:nvPr/>
+        </p:nvSpPr>
+        <p:spPr>
+          <a:xfrm>
+            <a:off x="7509013" y="498895"/>
+            <a:ext cx="966159" cy="369332"/>
+          </a:xfrm>
+          <a:prstGeom prst="rect">
+            <a:avLst/>
+          </a:prstGeom>
+          <a:noFill/>
+        </p:spPr>
+        <p:txBody>
+          <a:bodyPr wrap="square" rtlCol="0">
+            <a:spAutoFit/>
+          </a:bodyPr>
+          <a:lstStyle/>
+          <a:p>
+            <a:r>
+              <a:rPr lang="en-US"/>
+              <a:t>push</a:t>
+            </a:r>
+          </a:p>
+        </p:txBody>
+      </p:sp>
+      <p:sp>
+        <p:nvSpPr>
+          <p:cNvPr id="26" name="TextBox 25">
+            <a:extLst>
+              <a:ext uri="{FF2B5EF4-FFF2-40B4-BE49-F238E27FC236}">
+                <a16:creationId xmlns:a16="http://schemas.microsoft.com/office/drawing/2014/main" id="{CB90DEB7-AAF5-AC9F-58DD-4E64FC3882AD}"/>
+              </a:ext>
+            </a:extLst>
+          </p:cNvPr>
+          <p:cNvSpPr txBox="1"/>
+          <p:nvPr/>
+        </p:nvSpPr>
+        <p:spPr>
+          <a:xfrm>
+            <a:off x="7640128" y="1330307"/>
+            <a:ext cx="966159" cy="369332"/>
+          </a:xfrm>
+          <a:prstGeom prst="rect">
+            <a:avLst/>
+          </a:prstGeom>
+          <a:noFill/>
+        </p:spPr>
+        <p:txBody>
+          <a:bodyPr wrap="square" rtlCol="0">
+            <a:spAutoFit/>
+          </a:bodyPr>
+          <a:lstStyle/>
+          <a:p>
+            <a:r>
+              <a:rPr lang="en-US"/>
+              <a:t>pop</a:t>
+            </a:r>
+          </a:p>
+        </p:txBody>
+      </p:sp>
+      <p:cxnSp>
+        <p:nvCxnSpPr>
+          <p:cNvPr id="28" name="Straight Arrow Connector 27">
+            <a:extLst>
+              <a:ext uri="{FF2B5EF4-FFF2-40B4-BE49-F238E27FC236}">
+                <a16:creationId xmlns:a16="http://schemas.microsoft.com/office/drawing/2014/main" id="{A8DCA0B7-895E-50D9-E4F7-31C3321687B0}"/>
+              </a:ext>
+            </a:extLst>
+          </p:cNvPr>
+          <p:cNvCxnSpPr>
+            <a:cxnSpLocks/>
+          </p:cNvCxnSpPr>
+          <p:nvPr/>
+        </p:nvCxnSpPr>
+        <p:spPr>
+          <a:xfrm>
+            <a:off x="3118419" y="2315333"/>
+            <a:ext cx="2215508" cy="1289321"/>
+          </a:xfrm>
+          <a:prstGeom prst="straightConnector1">
+            <a:avLst/>
+          </a:prstGeom>
+          <a:ln>
+            <a:tailEnd type="triangle"/>
+          </a:ln>
+        </p:spPr>
+        <p:style>
+          <a:lnRef idx="3">
+            <a:schemeClr val="accent2"/>
+          </a:lnRef>
+          <a:fillRef idx="0">
+            <a:schemeClr val="accent2"/>
+          </a:fillRef>
+          <a:effectRef idx="2">
+            <a:schemeClr val="accent2"/>
+          </a:effectRef>
+          <a:fontRef idx="minor">
+            <a:schemeClr val="tx1"/>
+          </a:fontRef>
+        </p:style>
+      </p:cxnSp>
+      <p:sp>
+        <p:nvSpPr>
+          <p:cNvPr id="31" name="Rectangle 30">
+            <a:extLst>
+              <a:ext uri="{FF2B5EF4-FFF2-40B4-BE49-F238E27FC236}">
+                <a16:creationId xmlns:a16="http://schemas.microsoft.com/office/drawing/2014/main" id="{06261BA3-E65D-34C8-8023-FECC8793AB07}"/>
+              </a:ext>
+            </a:extLst>
+          </p:cNvPr>
+          <p:cNvSpPr/>
+          <p:nvPr/>
+        </p:nvSpPr>
+        <p:spPr>
+          <a:xfrm>
+            <a:off x="8876581" y="2477832"/>
+            <a:ext cx="1316966" cy="231612"/>
+          </a:xfrm>
+          <a:prstGeom prst="rect">
+            <a:avLst/>
+          </a:prstGeom>
+        </p:spPr>
+        <p:style>
+          <a:lnRef idx="2">
+            <a:schemeClr val="accent4">
+              <a:shade val="15000"/>
+            </a:schemeClr>
+          </a:lnRef>
+          <a:fillRef idx="1">
+            <a:schemeClr val="accent4"/>
+          </a:fillRef>
+          <a:effectRef idx="0">
+            <a:schemeClr val="accent4"/>
+          </a:effectRef>
+          <a:fontRef idx="minor">
+            <a:schemeClr val="lt1"/>
+          </a:fontRef>
+        </p:style>
+        <p:txBody>
+          <a:bodyPr rtlCol="0" anchor="ctr"/>
+          <a:lstStyle/>
+          <a:p>
+            <a:pPr algn="ctr"/>
+            <a:r>
+              <a:rPr lang="en-US"/>
+              <a:t>A = 3</a:t>
+            </a:r>
+          </a:p>
+        </p:txBody>
+      </p:sp>
+      <p:sp>
+        <p:nvSpPr>
+          <p:cNvPr id="33" name="Rectangle 32">
+            <a:extLst>
+              <a:ext uri="{FF2B5EF4-FFF2-40B4-BE49-F238E27FC236}">
+                <a16:creationId xmlns:a16="http://schemas.microsoft.com/office/drawing/2014/main" id="{099FF72B-0BA3-1AB7-3975-D2942238DC16}"/>
+              </a:ext>
+            </a:extLst>
+          </p:cNvPr>
+          <p:cNvSpPr/>
+          <p:nvPr/>
+        </p:nvSpPr>
+        <p:spPr>
+          <a:xfrm>
+            <a:off x="8866411" y="2708693"/>
+            <a:ext cx="1316966" cy="231612"/>
+          </a:xfrm>
+          <a:prstGeom prst="rect">
+            <a:avLst/>
+          </a:prstGeom>
+        </p:spPr>
+        <p:style>
+          <a:lnRef idx="3">
+            <a:schemeClr val="lt1"/>
+          </a:lnRef>
+          <a:fillRef idx="1">
+            <a:schemeClr val="accent6"/>
+          </a:fillRef>
+          <a:effectRef idx="1">
+            <a:schemeClr val="accent6"/>
+          </a:effectRef>
+          <a:fontRef idx="minor">
+            <a:schemeClr val="lt1"/>
+          </a:fontRef>
+        </p:style>
+        <p:txBody>
+          <a:bodyPr rtlCol="0" anchor="ctr"/>
+          <a:lstStyle/>
+          <a:p>
+            <a:pPr algn="ctr"/>
+            <a:r>
+              <a:rPr lang="en-US"/>
+              <a:t>B = 4</a:t>
+            </a:r>
+          </a:p>
+        </p:txBody>
+      </p:sp>
+      <p:sp>
+        <p:nvSpPr>
+          <p:cNvPr id="34" name="Rectangle 33">
+            <a:extLst>
+              <a:ext uri="{FF2B5EF4-FFF2-40B4-BE49-F238E27FC236}">
+                <a16:creationId xmlns:a16="http://schemas.microsoft.com/office/drawing/2014/main" id="{5C26F84B-121B-C48A-EF8A-D59E9E4DE08D}"/>
+              </a:ext>
+            </a:extLst>
+          </p:cNvPr>
+          <p:cNvSpPr/>
+          <p:nvPr/>
+        </p:nvSpPr>
+        <p:spPr>
+          <a:xfrm>
+            <a:off x="9024668" y="2962146"/>
+            <a:ext cx="1306796" cy="198832"/>
+          </a:xfrm>
+          <a:prstGeom prst="rect">
+            <a:avLst/>
+          </a:prstGeom>
+        </p:spPr>
+        <p:style>
+          <a:lnRef idx="1">
+            <a:schemeClr val="accent5"/>
+          </a:lnRef>
+          <a:fillRef idx="3">
+            <a:schemeClr val="accent5"/>
+          </a:fillRef>
+          <a:effectRef idx="2">
+            <a:schemeClr val="accent5"/>
+          </a:effectRef>
+          <a:fontRef idx="minor">
+            <a:schemeClr val="lt1"/>
+          </a:fontRef>
+        </p:style>
+        <p:txBody>
+          <a:bodyPr rtlCol="0" anchor="ctr"/>
+          <a:lstStyle/>
+          <a:p>
+            <a:pPr algn="ctr"/>
+            <a:r>
+              <a:rPr lang="en-US"/>
+              <a:t>c</a:t>
+            </a:r>
+          </a:p>
+        </p:txBody>
+      </p:sp>
+      <p:cxnSp>
+        <p:nvCxnSpPr>
+          <p:cNvPr id="36" name="Straight Arrow Connector 35">
+            <a:extLst>
+              <a:ext uri="{FF2B5EF4-FFF2-40B4-BE49-F238E27FC236}">
+                <a16:creationId xmlns:a16="http://schemas.microsoft.com/office/drawing/2014/main" id="{4BAACCD5-55E7-CE3A-BAE6-322DCCA122FF}"/>
+              </a:ext>
+            </a:extLst>
+          </p:cNvPr>
+          <p:cNvCxnSpPr/>
+          <p:nvPr/>
+        </p:nvCxnSpPr>
+        <p:spPr>
+          <a:xfrm flipH="1" flipV="1">
+            <a:off x="2327589" y="2959993"/>
+            <a:ext cx="3027872" cy="2148040"/>
+          </a:xfrm>
+          <a:prstGeom prst="straightConnector1">
+            <a:avLst/>
+          </a:prstGeom>
+          <a:ln>
+            <a:tailEnd type="triangle"/>
+          </a:ln>
+        </p:spPr>
+        <p:style>
+          <a:lnRef idx="3">
+            <a:schemeClr val="dk1"/>
+          </a:lnRef>
+          <a:fillRef idx="0">
+            <a:schemeClr val="dk1"/>
+          </a:fillRef>
+          <a:effectRef idx="2">
+            <a:schemeClr val="dk1"/>
+          </a:effectRef>
+          <a:fontRef idx="minor">
+            <a:schemeClr val="tx1"/>
+          </a:fontRef>
+        </p:style>
+      </p:cxnSp>
+      <p:sp>
+        <p:nvSpPr>
+          <p:cNvPr id="37" name="Rectangle 36">
+            <a:extLst>
+              <a:ext uri="{FF2B5EF4-FFF2-40B4-BE49-F238E27FC236}">
+                <a16:creationId xmlns:a16="http://schemas.microsoft.com/office/drawing/2014/main" id="{20DB69FE-B798-289E-C915-CC185D7369E7}"/>
+              </a:ext>
+            </a:extLst>
+          </p:cNvPr>
+          <p:cNvSpPr/>
+          <p:nvPr/>
+        </p:nvSpPr>
+        <p:spPr>
+          <a:xfrm>
+            <a:off x="8886751" y="2193704"/>
+            <a:ext cx="1306796" cy="198832"/>
+          </a:xfrm>
+          <a:prstGeom prst="rect">
+            <a:avLst/>
+          </a:prstGeom>
+        </p:spPr>
+        <p:style>
+          <a:lnRef idx="1">
+            <a:schemeClr val="accent3"/>
+          </a:lnRef>
+          <a:fillRef idx="3">
+            <a:schemeClr val="accent3"/>
+          </a:fillRef>
+          <a:effectRef idx="2">
+            <a:schemeClr val="accent3"/>
+          </a:effectRef>
+          <a:fontRef idx="minor">
+            <a:schemeClr val="lt1"/>
+          </a:fontRef>
+        </p:style>
+        <p:txBody>
+          <a:bodyPr rtlCol="0" anchor="ctr"/>
+          <a:lstStyle/>
+          <a:p>
+            <a:pPr algn="ctr"/>
+            <a:r>
+              <a:rPr lang="en-US"/>
+              <a:t>Zcall icall xiu</a:t>
+            </a:r>
+          </a:p>
+        </p:txBody>
+      </p:sp>
+      <p:sp>
+        <p:nvSpPr>
+          <p:cNvPr id="38" name="Rectangle 37">
+            <a:extLst>
+              <a:ext uri="{FF2B5EF4-FFF2-40B4-BE49-F238E27FC236}">
+                <a16:creationId xmlns:a16="http://schemas.microsoft.com/office/drawing/2014/main" id="{0895E05A-208E-4C34-7F54-464D24C25291}"/>
+              </a:ext>
+            </a:extLst>
+          </p:cNvPr>
+          <p:cNvSpPr/>
+          <p:nvPr/>
+        </p:nvSpPr>
+        <p:spPr>
+          <a:xfrm>
+            <a:off x="10647380" y="3181548"/>
+            <a:ext cx="1306796" cy="198832"/>
+          </a:xfrm>
+          <a:prstGeom prst="rect">
+            <a:avLst/>
+          </a:prstGeom>
+          <a:solidFill>
+            <a:srgbClr val="F4DEB3"/>
+          </a:solidFill>
+        </p:spPr>
+        <p:style>
+          <a:lnRef idx="1">
+            <a:schemeClr val="accent5"/>
+          </a:lnRef>
+          <a:fillRef idx="3">
+            <a:schemeClr val="accent5"/>
+          </a:fillRef>
+          <a:effectRef idx="2">
+            <a:schemeClr val="accent5"/>
+          </a:effectRef>
+          <a:fontRef idx="minor">
+            <a:schemeClr val="lt1"/>
+          </a:fontRef>
+        </p:style>
+        <p:txBody>
+          <a:bodyPr rtlCol="0" anchor="ctr"/>
+          <a:lstStyle/>
+          <a:p>
+            <a:pPr algn="ctr"/>
+            <a:r>
+              <a:rPr lang="en-US"/>
+              <a:t>d</a:t>
+            </a:r>
+          </a:p>
+        </p:txBody>
+      </p:sp>
+      <p:cxnSp>
+        <p:nvCxnSpPr>
+          <p:cNvPr id="41" name="Straight Arrow Connector 40">
+            <a:extLst>
+              <a:ext uri="{FF2B5EF4-FFF2-40B4-BE49-F238E27FC236}">
+                <a16:creationId xmlns:a16="http://schemas.microsoft.com/office/drawing/2014/main" id="{4A102568-2566-9C12-3ACF-89ED3236D084}"/>
+              </a:ext>
+            </a:extLst>
+          </p:cNvPr>
+          <p:cNvCxnSpPr>
+            <a:cxnSpLocks/>
+          </p:cNvCxnSpPr>
+          <p:nvPr/>
+        </p:nvCxnSpPr>
+        <p:spPr>
+          <a:xfrm flipV="1">
+            <a:off x="10774392" y="2753650"/>
+            <a:ext cx="0" cy="3515794"/>
+          </a:xfrm>
+          <a:prstGeom prst="straightConnector1">
+            <a:avLst/>
+          </a:prstGeom>
+          <a:ln>
+            <a:tailEnd type="triangle"/>
+          </a:ln>
+        </p:spPr>
+        <p:style>
+          <a:lnRef idx="1">
+            <a:schemeClr val="accent1"/>
+          </a:lnRef>
+          <a:fillRef idx="0">
+            <a:schemeClr val="accent1"/>
+          </a:fillRef>
+          <a:effectRef idx="0">
+            <a:schemeClr val="accent1"/>
+          </a:effectRef>
+          <a:fontRef idx="minor">
+            <a:schemeClr val="tx1"/>
+          </a:fontRef>
+        </p:style>
+      </p:cxnSp>
+      <p:cxnSp>
+        <p:nvCxnSpPr>
+          <p:cNvPr id="46" name="Straight Connector 45">
+            <a:extLst>
+              <a:ext uri="{FF2B5EF4-FFF2-40B4-BE49-F238E27FC236}">
+                <a16:creationId xmlns:a16="http://schemas.microsoft.com/office/drawing/2014/main" id="{020DC819-9310-F6B4-F4C4-E7E77B8B7D79}"/>
+              </a:ext>
+            </a:extLst>
+          </p:cNvPr>
+          <p:cNvCxnSpPr/>
+          <p:nvPr/>
+        </p:nvCxnSpPr>
+        <p:spPr>
+          <a:xfrm>
+            <a:off x="7841411" y="4639833"/>
+            <a:ext cx="3864634" cy="0"/>
+          </a:xfrm>
+          <a:prstGeom prst="line">
+            <a:avLst/>
+          </a:prstGeom>
+        </p:spPr>
+        <p:style>
+          <a:lnRef idx="1">
+            <a:schemeClr val="accent1"/>
+          </a:lnRef>
+          <a:fillRef idx="0">
+            <a:schemeClr val="accent1"/>
+          </a:fillRef>
+          <a:effectRef idx="0">
+            <a:schemeClr val="accent1"/>
+          </a:effectRef>
+          <a:fontRef idx="minor">
+            <a:schemeClr val="tx1"/>
+          </a:fontRef>
+        </p:style>
+      </p:cxnSp>
+      <p:sp>
+        <p:nvSpPr>
+          <p:cNvPr id="47" name="TextBox 46">
+            <a:extLst>
+              <a:ext uri="{FF2B5EF4-FFF2-40B4-BE49-F238E27FC236}">
+                <a16:creationId xmlns:a16="http://schemas.microsoft.com/office/drawing/2014/main" id="{93B866AF-56EB-260B-9766-0D7E27EB32AA}"/>
+              </a:ext>
+            </a:extLst>
+          </p:cNvPr>
+          <p:cNvSpPr txBox="1"/>
+          <p:nvPr/>
+        </p:nvSpPr>
+        <p:spPr>
+          <a:xfrm>
+            <a:off x="7292198" y="4710023"/>
+            <a:ext cx="1473014" cy="369332"/>
+          </a:xfrm>
+          <a:prstGeom prst="rect">
+            <a:avLst/>
+          </a:prstGeom>
+          <a:noFill/>
+        </p:spPr>
+        <p:txBody>
+          <a:bodyPr wrap="square" rtlCol="0">
+            <a:spAutoFit/>
+          </a:bodyPr>
+          <a:lstStyle/>
+          <a:p>
+            <a:r>
+              <a:rPr lang="en-US"/>
+              <a:t>0xA000_0000</a:t>
+            </a:r>
+          </a:p>
+        </p:txBody>
+      </p:sp>
+      <p:sp>
+        <p:nvSpPr>
+          <p:cNvPr id="59" name="Rectangle 58">
+            <a:extLst>
+              <a:ext uri="{FF2B5EF4-FFF2-40B4-BE49-F238E27FC236}">
+                <a16:creationId xmlns:a16="http://schemas.microsoft.com/office/drawing/2014/main" id="{AC380C09-9645-BB97-BF11-AD38B01B8D68}"/>
+              </a:ext>
+            </a:extLst>
+          </p:cNvPr>
+          <p:cNvSpPr/>
+          <p:nvPr/>
+        </p:nvSpPr>
+        <p:spPr>
+          <a:xfrm>
+            <a:off x="10757065" y="3681124"/>
+            <a:ext cx="1306796" cy="198832"/>
+          </a:xfrm>
+          <a:prstGeom prst="rect">
+            <a:avLst/>
+          </a:prstGeom>
+          <a:solidFill>
+            <a:srgbClr val="F4DEB3"/>
+          </a:solidFill>
+        </p:spPr>
+        <p:style>
+          <a:lnRef idx="1">
+            <a:schemeClr val="accent5"/>
+          </a:lnRef>
+          <a:fillRef idx="3">
+            <a:schemeClr val="accent5"/>
+          </a:fillRef>
+          <a:effectRef idx="2">
+            <a:schemeClr val="accent5"/>
+          </a:effectRef>
+          <a:fontRef idx="minor">
+            <a:schemeClr val="lt1"/>
+          </a:fontRef>
+        </p:style>
+        <p:txBody>
+          <a:bodyPr rtlCol="0" anchor="ctr"/>
+          <a:lstStyle/>
+          <a:p>
+            <a:pPr algn="ctr"/>
+            <a:r>
+              <a:rPr lang="en-US"/>
+              <a:t>d</a:t>
+            </a:r>
+          </a:p>
+        </p:txBody>
+      </p:sp>
+      <p:sp>
+        <p:nvSpPr>
+          <p:cNvPr id="60" name="Rectangle 59">
+            <a:extLst>
+              <a:ext uri="{FF2B5EF4-FFF2-40B4-BE49-F238E27FC236}">
+                <a16:creationId xmlns:a16="http://schemas.microsoft.com/office/drawing/2014/main" id="{44653D22-1577-2074-7D48-D75C4316FDB6}"/>
+              </a:ext>
+            </a:extLst>
+          </p:cNvPr>
+          <p:cNvSpPr/>
+          <p:nvPr/>
+        </p:nvSpPr>
+        <p:spPr>
+          <a:xfrm>
+            <a:off x="10645208" y="4040841"/>
+            <a:ext cx="1306796" cy="198832"/>
+          </a:xfrm>
+          <a:prstGeom prst="rect">
+            <a:avLst/>
+          </a:prstGeom>
+          <a:solidFill>
+            <a:srgbClr val="F4DEB3"/>
+          </a:solidFill>
+        </p:spPr>
+        <p:style>
+          <a:lnRef idx="1">
+            <a:schemeClr val="accent5"/>
+          </a:lnRef>
+          <a:fillRef idx="3">
+            <a:schemeClr val="accent5"/>
+          </a:fillRef>
+          <a:effectRef idx="2">
+            <a:schemeClr val="accent5"/>
+          </a:effectRef>
+          <a:fontRef idx="minor">
+            <a:schemeClr val="lt1"/>
+          </a:fontRef>
+        </p:style>
+        <p:txBody>
+          <a:bodyPr rtlCol="0" anchor="ctr"/>
+          <a:lstStyle/>
+          <a:p>
+            <a:pPr algn="ctr"/>
+            <a:r>
+              <a:rPr lang="en-US"/>
+              <a:t>d</a:t>
+            </a:r>
+          </a:p>
+        </p:txBody>
+      </p:sp>
+    </p:spTree>
+    <p:extLst>
+      <p:ext uri="{BB962C8B-B14F-4D97-AF65-F5344CB8AC3E}">
+        <p14:creationId xmlns:p14="http://schemas.microsoft.com/office/powerpoint/2010/main" val="4240993995"/>
+      </p:ext>
+    </p:extLst>
+  </p:cSld>
+  <p:clrMapOvr>
+    <a:masterClrMapping/>
+  </p:clrMapOvr>
+</p:sld>
+</file>
+
+<file path=ppt/slides/slide7.xml><?xml version="1.0" encoding="utf-8"?>
 <p:sld xmlns:a="http://schemas.openxmlformats.org/drawingml/2006/main" xmlns:r="http://schemas.openxmlformats.org/officeDocument/2006/relationships" xmlns:p="http://schemas.openxmlformats.org/presentationml/2006/main">
   <p:cSld>
     <p:spTree>
@@ -7179,7 +8593,7 @@
 </p:sld>
 </file>
 
-<file path=ppt/slides/slide7.xml><?xml version="1.0" encoding="utf-8"?>
+<file path=ppt/slides/slide8.xml><?xml version="1.0" encoding="utf-8"?>
 <p:sld xmlns:a="http://schemas.openxmlformats.org/drawingml/2006/main" xmlns:r="http://schemas.openxmlformats.org/officeDocument/2006/relationships" xmlns:p="http://schemas.openxmlformats.org/presentationml/2006/main">
   <p:cSld>
     <p:spTree>
@@ -7349,7 +8763,7 @@
 </p:sld>
 </file>
 
-<file path=ppt/slides/slide8.xml><?xml version="1.0" encoding="utf-8"?>
+<file path=ppt/slides/slide9.xml><?xml version="1.0" encoding="utf-8"?>
 <p:sld xmlns:a="http://schemas.openxmlformats.org/drawingml/2006/main" xmlns:r="http://schemas.openxmlformats.org/officeDocument/2006/relationships" xmlns:p="http://schemas.openxmlformats.org/presentationml/2006/main">
   <p:cSld>
     <p:spTree>
@@ -7562,176 +8976,6 @@
     <p:extLst>
       <p:ext uri="{BB962C8B-B14F-4D97-AF65-F5344CB8AC3E}">
         <p14:creationId xmlns:p14="http://schemas.microsoft.com/office/powerpoint/2010/main" val="884529763"/>
-      </p:ext>
-    </p:extLst>
-  </p:cSld>
-  <p:clrMapOvr>
-    <a:masterClrMapping/>
-  </p:clrMapOvr>
-</p:sld>
-</file>
-
-<file path=ppt/slides/slide9.xml><?xml version="1.0" encoding="utf-8"?>
-<p:sld xmlns:a="http://schemas.openxmlformats.org/drawingml/2006/main" xmlns:r="http://schemas.openxmlformats.org/officeDocument/2006/relationships" xmlns:p="http://schemas.openxmlformats.org/presentationml/2006/main">
-  <p:cSld>
-    <p:spTree>
-      <p:nvGrpSpPr>
-        <p:cNvPr id="1" name="">
-          <a:extLst>
-            <a:ext uri="{FF2B5EF4-FFF2-40B4-BE49-F238E27FC236}">
-              <a16:creationId xmlns:a16="http://schemas.microsoft.com/office/drawing/2014/main" id="{F6271311-D295-342A-425D-C41828B1A8FE}"/>
-            </a:ext>
-          </a:extLst>
-        </p:cNvPr>
-        <p:cNvGrpSpPr/>
-        <p:nvPr/>
-      </p:nvGrpSpPr>
-      <p:grpSpPr>
-        <a:xfrm>
-          <a:off x="0" y="0"/>
-          <a:ext cx="0" cy="0"/>
-          <a:chOff x="0" y="0"/>
-          <a:chExt cx="0" cy="0"/>
-        </a:xfrm>
-      </p:grpSpPr>
-      <p:pic>
-        <p:nvPicPr>
-          <p:cNvPr id="6" name="Picture 5">
-            <a:extLst>
-              <a:ext uri="{FF2B5EF4-FFF2-40B4-BE49-F238E27FC236}">
-                <a16:creationId xmlns:a16="http://schemas.microsoft.com/office/drawing/2014/main" id="{A04E9534-2FAF-6672-FADF-2ED8012E5721}"/>
-              </a:ext>
-            </a:extLst>
-          </p:cNvPr>
-          <p:cNvPicPr>
-            <a:picLocks noChangeAspect="1"/>
-          </p:cNvPicPr>
-          <p:nvPr/>
-        </p:nvPicPr>
-        <p:blipFill>
-          <a:blip r:embed="rId2" cstate="print">
-            <a:extLst>
-              <a:ext uri="{28A0092B-C50C-407E-A947-70E740481C1C}">
-                <a14:useLocalDpi xmlns:a14="http://schemas.microsoft.com/office/drawing/2010/main" val="0"/>
-              </a:ext>
-            </a:extLst>
-          </a:blip>
-          <a:stretch>
-            <a:fillRect/>
-          </a:stretch>
-        </p:blipFill>
-        <p:spPr>
-          <a:xfrm>
-            <a:off x="-117663" y="-89806"/>
-            <a:ext cx="12277005" cy="1420585"/>
-          </a:xfrm>
-          <a:prstGeom prst="rect">
-            <a:avLst/>
-          </a:prstGeom>
-        </p:spPr>
-      </p:pic>
-      <p:sp>
-        <p:nvSpPr>
-          <p:cNvPr id="2" name="TextBox 1">
-            <a:extLst>
-              <a:ext uri="{FF2B5EF4-FFF2-40B4-BE49-F238E27FC236}">
-                <a16:creationId xmlns:a16="http://schemas.microsoft.com/office/drawing/2014/main" id="{41B1E790-DAC7-2AB5-9300-359DF317C815}"/>
-              </a:ext>
-            </a:extLst>
-          </p:cNvPr>
-          <p:cNvSpPr txBox="1"/>
-          <p:nvPr/>
-        </p:nvSpPr>
-        <p:spPr>
-          <a:xfrm>
-            <a:off x="499933" y="1406106"/>
-            <a:ext cx="5520906" cy="707886"/>
-          </a:xfrm>
-          <a:prstGeom prst="rect">
-            <a:avLst/>
-          </a:prstGeom>
-          <a:solidFill>
-            <a:srgbClr val="EF9C66"/>
-          </a:solidFill>
-        </p:spPr>
-        <p:txBody>
-          <a:bodyPr wrap="square" rtlCol="0">
-            <a:spAutoFit/>
-          </a:bodyPr>
-          <a:lstStyle/>
-          <a:p>
-            <a:r>
-              <a:rPr lang="en-US" sz="4000"/>
-              <a:t>2. Programing language</a:t>
-            </a:r>
-          </a:p>
-        </p:txBody>
-      </p:sp>
-      <p:sp>
-        <p:nvSpPr>
-          <p:cNvPr id="3" name="TextBox 2">
-            <a:extLst>
-              <a:ext uri="{FF2B5EF4-FFF2-40B4-BE49-F238E27FC236}">
-                <a16:creationId xmlns:a16="http://schemas.microsoft.com/office/drawing/2014/main" id="{0CCAD01D-B3F0-3378-3F0E-CEB67854FD7A}"/>
-              </a:ext>
-            </a:extLst>
-          </p:cNvPr>
-          <p:cNvSpPr txBox="1"/>
-          <p:nvPr/>
-        </p:nvSpPr>
-        <p:spPr>
-          <a:xfrm>
-            <a:off x="499933" y="2305050"/>
-            <a:ext cx="10387142" cy="1569660"/>
-          </a:xfrm>
-          <a:prstGeom prst="rect">
-            <a:avLst/>
-          </a:prstGeom>
-          <a:solidFill>
-            <a:srgbClr val="C8CFA0"/>
-          </a:solidFill>
-        </p:spPr>
-        <p:txBody>
-          <a:bodyPr wrap="square" rtlCol="0">
-            <a:spAutoFit/>
-          </a:bodyPr>
-          <a:lstStyle/>
-          <a:p>
-            <a:pPr marL="285750" indent="-285750">
-              <a:buFont typeface="Arial" panose="020B0604020202020204" pitchFamily="34" charset="0"/>
-              <a:buChar char="•"/>
-            </a:pPr>
-            <a:r>
-              <a:rPr lang="en-US" sz="3200"/>
-              <a:t>C language</a:t>
-            </a:r>
-          </a:p>
-          <a:p>
-            <a:pPr marL="742950" lvl="1" indent="-285750">
-              <a:buFont typeface="Arial" panose="020B0604020202020204" pitchFamily="34" charset="0"/>
-              <a:buChar char="•"/>
-            </a:pPr>
-            <a:r>
-              <a:rPr lang="en-US" sz="3200"/>
-              <a:t>Human readable</a:t>
-            </a:r>
-          </a:p>
-          <a:p>
-            <a:pPr marL="742950" lvl="1" indent="-285750">
-              <a:buFont typeface="Arial" panose="020B0604020202020204" pitchFamily="34" charset="0"/>
-              <a:buChar char="•"/>
-            </a:pPr>
-            <a:r>
-              <a:rPr lang="en-US" sz="3200"/>
-              <a:t>Computer cannot understand</a:t>
-            </a:r>
-          </a:p>
-        </p:txBody>
-      </p:sp>
-    </p:spTree>
-    <p:extLst>
-      <p:ext uri="{BB962C8B-B14F-4D97-AF65-F5344CB8AC3E}">
-        <p14:creationId xmlns:p14="http://schemas.microsoft.com/office/powerpoint/2010/main" val="2747209921"/>
       </p:ext>
     </p:extLst>
   </p:cSld>

--- a/Slide/C/4.C_stage_File.pptx
+++ b/Slide/C/4.C_stage_File.pptx
@@ -267,7 +267,7 @@
           <a:p>
             <a:fld id="{ECA3AE87-C17F-4F2C-92FF-7FE21F8A66BE}" type="datetimeFigureOut">
               <a:rPr lang="en-US" smtClean="0"/>
-              <a:t>4/24/2025</a:t>
+              <a:t>1/12/2026</a:t>
             </a:fld>
             <a:endParaRPr lang="en-US"/>
           </a:p>
@@ -435,7 +435,7 @@
           <a:p>
             <a:fld id="{ECA3AE87-C17F-4F2C-92FF-7FE21F8A66BE}" type="datetimeFigureOut">
               <a:rPr lang="en-US" smtClean="0"/>
-              <a:t>4/24/2025</a:t>
+              <a:t>1/12/2026</a:t>
             </a:fld>
             <a:endParaRPr lang="en-US"/>
           </a:p>
@@ -613,7 +613,7 @@
           <a:p>
             <a:fld id="{ECA3AE87-C17F-4F2C-92FF-7FE21F8A66BE}" type="datetimeFigureOut">
               <a:rPr lang="en-US" smtClean="0"/>
-              <a:t>4/24/2025</a:t>
+              <a:t>1/12/2026</a:t>
             </a:fld>
             <a:endParaRPr lang="en-US"/>
           </a:p>
@@ -781,7 +781,7 @@
           <a:p>
             <a:fld id="{ECA3AE87-C17F-4F2C-92FF-7FE21F8A66BE}" type="datetimeFigureOut">
               <a:rPr lang="en-US" smtClean="0"/>
-              <a:t>4/24/2025</a:t>
+              <a:t>1/12/2026</a:t>
             </a:fld>
             <a:endParaRPr lang="en-US"/>
           </a:p>
@@ -1026,7 +1026,7 @@
           <a:p>
             <a:fld id="{ECA3AE87-C17F-4F2C-92FF-7FE21F8A66BE}" type="datetimeFigureOut">
               <a:rPr lang="en-US" smtClean="0"/>
-              <a:t>4/24/2025</a:t>
+              <a:t>1/12/2026</a:t>
             </a:fld>
             <a:endParaRPr lang="en-US"/>
           </a:p>
@@ -1255,7 +1255,7 @@
           <a:p>
             <a:fld id="{ECA3AE87-C17F-4F2C-92FF-7FE21F8A66BE}" type="datetimeFigureOut">
               <a:rPr lang="en-US" smtClean="0"/>
-              <a:t>4/24/2025</a:t>
+              <a:t>1/12/2026</a:t>
             </a:fld>
             <a:endParaRPr lang="en-US"/>
           </a:p>
@@ -1619,7 +1619,7 @@
           <a:p>
             <a:fld id="{ECA3AE87-C17F-4F2C-92FF-7FE21F8A66BE}" type="datetimeFigureOut">
               <a:rPr lang="en-US" smtClean="0"/>
-              <a:t>4/24/2025</a:t>
+              <a:t>1/12/2026</a:t>
             </a:fld>
             <a:endParaRPr lang="en-US"/>
           </a:p>
@@ -1736,7 +1736,7 @@
           <a:p>
             <a:fld id="{ECA3AE87-C17F-4F2C-92FF-7FE21F8A66BE}" type="datetimeFigureOut">
               <a:rPr lang="en-US" smtClean="0"/>
-              <a:t>4/24/2025</a:t>
+              <a:t>1/12/2026</a:t>
             </a:fld>
             <a:endParaRPr lang="en-US"/>
           </a:p>
@@ -1831,7 +1831,7 @@
           <a:p>
             <a:fld id="{ECA3AE87-C17F-4F2C-92FF-7FE21F8A66BE}" type="datetimeFigureOut">
               <a:rPr lang="en-US" smtClean="0"/>
-              <a:t>4/24/2025</a:t>
+              <a:t>1/12/2026</a:t>
             </a:fld>
             <a:endParaRPr lang="en-US"/>
           </a:p>
@@ -2106,7 +2106,7 @@
           <a:p>
             <a:fld id="{ECA3AE87-C17F-4F2C-92FF-7FE21F8A66BE}" type="datetimeFigureOut">
               <a:rPr lang="en-US" smtClean="0"/>
-              <a:t>4/24/2025</a:t>
+              <a:t>1/12/2026</a:t>
             </a:fld>
             <a:endParaRPr lang="en-US"/>
           </a:p>
@@ -2358,7 +2358,7 @@
           <a:p>
             <a:fld id="{ECA3AE87-C17F-4F2C-92FF-7FE21F8A66BE}" type="datetimeFigureOut">
               <a:rPr lang="en-US" smtClean="0"/>
-              <a:t>4/24/2025</a:t>
+              <a:t>1/12/2026</a:t>
             </a:fld>
             <a:endParaRPr lang="en-US"/>
           </a:p>
@@ -2569,7 +2569,7 @@
           <a:p>
             <a:fld id="{ECA3AE87-C17F-4F2C-92FF-7FE21F8A66BE}" type="datetimeFigureOut">
               <a:rPr lang="en-US" smtClean="0"/>
-              <a:t>4/24/2025</a:t>
+              <a:t>1/12/2026</a:t>
             </a:fld>
             <a:endParaRPr lang="en-US"/>
           </a:p>
@@ -6518,7 +6518,7 @@
           <a:p>
             <a:r>
               <a:rPr lang="en-US" dirty="0"/>
-              <a:t>assembler</a:t>
+              <a:t>compiler</a:t>
             </a:r>
           </a:p>
         </p:txBody>
@@ -6626,7 +6626,7 @@
         </p:nvSpPr>
         <p:spPr>
           <a:xfrm>
-            <a:off x="9779267" y="4926697"/>
+            <a:off x="9779267" y="5792971"/>
             <a:ext cx="1070008" cy="866274"/>
           </a:xfrm>
           <a:prstGeom prst="rect">
@@ -6677,7 +6677,7 @@
         <p:spPr>
           <a:xfrm>
             <a:off x="10314271" y="4591251"/>
-            <a:ext cx="0" cy="335446"/>
+            <a:ext cx="0" cy="1201720"/>
           </a:xfrm>
           <a:prstGeom prst="straightConnector1">
             <a:avLst/>
@@ -6701,6 +6701,76 @@
           </a:fontRef>
         </p:style>
       </p:cxnSp>
+      <p:sp>
+        <p:nvSpPr>
+          <p:cNvPr id="5" name="TextBox 4">
+            <a:extLst>
+              <a:ext uri="{FF2B5EF4-FFF2-40B4-BE49-F238E27FC236}">
+                <a16:creationId xmlns:a16="http://schemas.microsoft.com/office/drawing/2014/main" id="{74804E7F-FE26-C7DE-DC72-093B847CCE81}"/>
+              </a:ext>
+            </a:extLst>
+          </p:cNvPr>
+          <p:cNvSpPr txBox="1"/>
+          <p:nvPr/>
+        </p:nvSpPr>
+        <p:spPr>
+          <a:xfrm>
+            <a:off x="9779267" y="2917893"/>
+            <a:ext cx="1212783" cy="369332"/>
+          </a:xfrm>
+          <a:prstGeom prst="rect">
+            <a:avLst/>
+          </a:prstGeom>
+          <a:noFill/>
+        </p:spPr>
+        <p:txBody>
+          <a:bodyPr wrap="square" rtlCol="0">
+            <a:spAutoFit/>
+          </a:bodyPr>
+          <a:lstStyle/>
+          <a:p>
+            <a:r>
+              <a:rPr lang="en-US" dirty="0"/>
+              <a:t>assembler</a:t>
+            </a:r>
+          </a:p>
+        </p:txBody>
+      </p:sp>
+      <p:sp>
+        <p:nvSpPr>
+          <p:cNvPr id="8" name="TextBox 7">
+            <a:extLst>
+              <a:ext uri="{FF2B5EF4-FFF2-40B4-BE49-F238E27FC236}">
+                <a16:creationId xmlns:a16="http://schemas.microsoft.com/office/drawing/2014/main" id="{41F4272F-47E9-9489-0DAF-59F497AAD253}"/>
+              </a:ext>
+            </a:extLst>
+          </p:cNvPr>
+          <p:cNvSpPr txBox="1"/>
+          <p:nvPr/>
+        </p:nvSpPr>
+        <p:spPr>
+          <a:xfrm>
+            <a:off x="10674417" y="4950764"/>
+            <a:ext cx="962526" cy="369332"/>
+          </a:xfrm>
+          <a:prstGeom prst="rect">
+            <a:avLst/>
+          </a:prstGeom>
+          <a:noFill/>
+        </p:spPr>
+        <p:txBody>
+          <a:bodyPr wrap="square" rtlCol="0">
+            <a:spAutoFit/>
+          </a:bodyPr>
+          <a:lstStyle/>
+          <a:p>
+            <a:r>
+              <a:rPr lang="en-US" dirty="0"/>
+              <a:t>linking</a:t>
+            </a:r>
+          </a:p>
+        </p:txBody>
+      </p:sp>
     </p:spTree>
     <p:extLst>
       <p:ext uri="{BB962C8B-B14F-4D97-AF65-F5344CB8AC3E}">
